--- a/presentation-gameon.pptx
+++ b/presentation-gameon.pptx
@@ -202,7 +202,7 @@
           <a:p>
             <a:fld id="{A5EB5074-DB72-1144-9F12-611469B8E149}" type="datetimeFigureOut">
               <a:rPr lang="fr-FR" smtClean="0"/>
-              <a:t>01/05/2024</a:t>
+              <a:t>03/05/2024</a:t>
             </a:fld>
             <a:endParaRPr lang="fr-FR"/>
           </a:p>
@@ -3746,8 +3746,12 @@
           <a:p>
             <a:pPr algn="l"/>
             <a:r>
+              <a:rPr lang="fr-FR" sz="6400" b="1" u="sng"/>
+              <a:t>Projet 4 </a:t>
+            </a:r>
+            <a:r>
               <a:rPr lang="fr-FR" sz="6400" b="1" u="sng" dirty="0"/>
-              <a:t>Projet 3 : GameOn</a:t>
+              <a:t>: GameOn</a:t>
             </a:r>
             <a:br>
               <a:rPr lang="fr-FR" sz="4800" dirty="0"/>
